--- a/硬體描述語言/03 sort_pipe/S1154041.pptx
+++ b/硬體描述語言/03 sort_pipe/S1154041.pptx
@@ -2123,12 +2123,71 @@
           <a:chExt cx="0" cy="0"/>
         </a:xfrm>
       </p:grpSpPr>
+      <p:sp>
+        <p:nvSpPr>
+          <p:cNvPr id="2" name="標題 1"/>
+          <p:cNvSpPr>
+            <a:spLocks noGrp="1"/>
+          </p:cNvSpPr>
+          <p:nvPr>
+            <p:ph type="title"/>
+          </p:nvPr>
+        </p:nvSpPr>
+        <p:spPr/>
+        <p:txBody>
+          <a:bodyPr/>
+          <a:lstStyle/>
+          <a:p>
+            <a:r>
+              <a:rPr lang="zh-TW" altLang="en-US" dirty="0"/>
+              <a:t>作業</a:t>
+            </a:r>
+            <a:br>
+              <a:rPr lang="en-US" altLang="zh-TW" dirty="0"/>
+            </a:br>
+            <a:r>
+              <a:rPr lang="en-US" altLang="zh-TW" dirty="0"/>
+              <a:t>Verilog Code (sort4_pipe.v)</a:t>
+            </a:r>
+            <a:endParaRPr lang="zh-TW" altLang="en-US" dirty="0"/>
+          </a:p>
+        </p:txBody>
+      </p:sp>
+      <p:sp>
+        <p:nvSpPr>
+          <p:cNvPr id="4" name="投影片編號版面配置區 3"/>
+          <p:cNvSpPr>
+            <a:spLocks noGrp="1"/>
+          </p:cNvSpPr>
+          <p:nvPr>
+            <p:ph type="sldNum" sz="quarter" idx="10"/>
+          </p:nvPr>
+        </p:nvSpPr>
+        <p:spPr/>
+        <p:txBody>
+          <a:bodyPr/>
+          <a:lstStyle/>
+          <a:p>
+            <a:pPr>
+              <a:defRPr/>
+            </a:pPr>
+            <a:fld id="{CA6739E1-4F7D-4A52-BD40-FD1F0A58EA9D}" type="slidenum">
+              <a:rPr lang="en-US" altLang="zh-TW" smtClean="0"/>
+              <a:pPr>
+                <a:defRPr/>
+              </a:pPr>
+              <a:t>2</a:t>
+            </a:fld>
+            <a:endParaRPr lang="en-US" altLang="zh-TW" dirty="0"/>
+          </a:p>
+        </p:txBody>
+      </p:sp>
       <p:pic>
         <p:nvPicPr>
-          <p:cNvPr id="6" name="圖片 5">
+          <p:cNvPr id="5" name="圖片 4">
             <a:extLst>
               <a:ext uri="{FF2B5EF4-FFF2-40B4-BE49-F238E27FC236}">
-                <a16:creationId xmlns:a16="http://schemas.microsoft.com/office/drawing/2014/main" id="{FF215486-AD4C-62D4-7633-C1542CE0ADE5}"/>
+                <a16:creationId xmlns:a16="http://schemas.microsoft.com/office/drawing/2014/main" id="{E7E4ABA9-904F-65FF-6A6A-71356C1B9F2E}"/>
               </a:ext>
             </a:extLst>
           </p:cNvPr>
@@ -2145,73 +2204,14 @@
         </p:blipFill>
         <p:spPr>
           <a:xfrm>
-            <a:off x="431800" y="1340446"/>
-            <a:ext cx="5497088" cy="5187218"/>
+            <a:off x="431800" y="1179185"/>
+            <a:ext cx="4887523" cy="5561856"/>
           </a:xfrm>
           <a:prstGeom prst="rect">
             <a:avLst/>
           </a:prstGeom>
         </p:spPr>
       </p:pic>
-      <p:sp>
-        <p:nvSpPr>
-          <p:cNvPr id="2" name="標題 1"/>
-          <p:cNvSpPr>
-            <a:spLocks noGrp="1"/>
-          </p:cNvSpPr>
-          <p:nvPr>
-            <p:ph type="title"/>
-          </p:nvPr>
-        </p:nvSpPr>
-        <p:spPr/>
-        <p:txBody>
-          <a:bodyPr/>
-          <a:lstStyle/>
-          <a:p>
-            <a:r>
-              <a:rPr lang="zh-TW" altLang="en-US" dirty="0"/>
-              <a:t>作業</a:t>
-            </a:r>
-            <a:br>
-              <a:rPr lang="en-US" altLang="zh-TW" dirty="0"/>
-            </a:br>
-            <a:r>
-              <a:rPr lang="en-US" altLang="zh-TW" dirty="0"/>
-              <a:t>Verilog Code (sort4_pipe.v)</a:t>
-            </a:r>
-            <a:endParaRPr lang="zh-TW" altLang="en-US" dirty="0"/>
-          </a:p>
-        </p:txBody>
-      </p:sp>
-      <p:sp>
-        <p:nvSpPr>
-          <p:cNvPr id="4" name="投影片編號版面配置區 3"/>
-          <p:cNvSpPr>
-            <a:spLocks noGrp="1"/>
-          </p:cNvSpPr>
-          <p:nvPr>
-            <p:ph type="sldNum" sz="quarter" idx="10"/>
-          </p:nvPr>
-        </p:nvSpPr>
-        <p:spPr/>
-        <p:txBody>
-          <a:bodyPr/>
-          <a:lstStyle/>
-          <a:p>
-            <a:pPr>
-              <a:defRPr/>
-            </a:pPr>
-            <a:fld id="{CA6739E1-4F7D-4A52-BD40-FD1F0A58EA9D}" type="slidenum">
-              <a:rPr lang="en-US" altLang="zh-TW" smtClean="0"/>
-              <a:pPr>
-                <a:defRPr/>
-              </a:pPr>
-              <a:t>2</a:t>
-            </a:fld>
-            <a:endParaRPr lang="en-US" altLang="zh-TW" dirty="0"/>
-          </a:p>
-        </p:txBody>
-      </p:sp>
     </p:spTree>
     <p:extLst>
       <p:ext uri="{BB962C8B-B14F-4D97-AF65-F5344CB8AC3E}">
